--- a/evals/assets/presentations/strategy-review.pptx
+++ b/evals/assets/presentations/strategy-review.pptx
@@ -448,7 +448,7 @@
         </p:nvSpPr>
         <p:spPr>
           <a:xfrm xmlns:a="http://schemas.openxmlformats.org/drawingml/2006/main">
-            <a:off x="685800" y="1847850"/>
+            <a:off x="685800" y="4953000"/>
             <a:ext cx="8763000" cy="762000"/>
           </a:xfrm>
           <a:prstGeom xmlns:a="http://schemas.openxmlformats.org/drawingml/2006/main" prst="rect">
